--- a/media/resources/files/Onduktar_Boluu1234_6EWrWlo.pptx
+++ b/media/resources/files/Onduktar_Boluu1234_6EWrWlo.pptx
@@ -2055,7 +2055,7 @@
             <a:pPr algn="ctr"/>
             <a:r>
               <a:rPr lang="en-GB" sz="2000" dirty="0"/>
-              <a:t>8 ÷ 0.1</a:t>
+              <a:t>8 ÷ 0,1</a:t>
             </a:r>
           </a:p>
         </p:txBody>
@@ -2286,7 +2286,7 @@
             <a:pPr algn="ctr"/>
             <a:r>
               <a:rPr lang="en-GB" sz="2000" dirty="0"/>
-              <a:t>9 ÷ 0.6</a:t>
+              <a:t>9 ÷ 0,6</a:t>
             </a:r>
           </a:p>
         </p:txBody>
@@ -2361,7 +2361,7 @@
             <a:pPr algn="ctr"/>
             <a:r>
               <a:rPr lang="en-GB" sz="2000" dirty="0"/>
-              <a:t>64.5 ÷ 1.5</a:t>
+              <a:t>64,5 ÷ 1,5</a:t>
             </a:r>
           </a:p>
         </p:txBody>
@@ -2436,7 +2436,7 @@
             <a:pPr algn="ctr"/>
             <a:r>
               <a:rPr lang="en-GB" sz="2000" dirty="0"/>
-              <a:t>22.72 ÷ 7.1</a:t>
+              <a:t>22,72 ÷ 7,1</a:t>
             </a:r>
           </a:p>
         </p:txBody>
@@ -2635,7 +2635,7 @@
             <a:pPr algn="ctr"/>
             <a:r>
               <a:rPr lang="en-GB" sz="2000" dirty="0"/>
-              <a:t>8 ÷ 0.1</a:t>
+              <a:t>8 ÷ 0,1</a:t>
             </a:r>
           </a:p>
         </p:txBody>
@@ -2911,7 +2911,7 @@
             <a:pPr algn="ctr"/>
             <a:r>
               <a:rPr lang="en-GB" sz="2000" dirty="0"/>
-              <a:t>9 ÷ 0.6</a:t>
+              <a:t>9 ÷ 0,6</a:t>
             </a:r>
           </a:p>
         </p:txBody>
@@ -3031,7 +3031,7 @@
             <a:pPr algn="ctr"/>
             <a:r>
               <a:rPr lang="en-GB" sz="2000" dirty="0"/>
-              <a:t>64.5 ÷ 1.5</a:t>
+              <a:t>64,5 ÷ 1,5</a:t>
             </a:r>
           </a:p>
         </p:txBody>
@@ -3151,7 +3151,7 @@
             <a:pPr algn="ctr"/>
             <a:r>
               <a:rPr lang="en-GB" sz="2000" dirty="0"/>
-              <a:t>22.72 ÷ 7.1</a:t>
+              <a:t>22,72 ÷ 7,1</a:t>
             </a:r>
           </a:p>
         </p:txBody>
@@ -3235,7 +3235,7 @@
             <a:pPr algn="just"/>
             <a:r>
               <a:rPr lang="en-GB" sz="2000" dirty="0"/>
-              <a:t>3.2</a:t>
+              <a:t>3,2</a:t>
             </a:r>
           </a:p>
         </p:txBody>
